--- a/Reporte 141026.pptx
+++ b/Reporte 141026.pptx
@@ -6574,10 +6574,10 @@
       </p:sp>
       <p:pic>
         <p:nvPicPr>
-          <p:cNvPr id="5" name="Imagen 4">
+          <p:cNvPr id="7" name="Imagen 6">
             <a:extLst>
               <a:ext uri="{FF2B5EF4-FFF2-40B4-BE49-F238E27FC236}">
-                <a16:creationId xmlns:a16="http://schemas.microsoft.com/office/drawing/2014/main" id="{21E707AF-25CA-04A1-3FE8-1ADEE834564C}"/>
+                <a16:creationId xmlns:a16="http://schemas.microsoft.com/office/drawing/2014/main" id="{E255ACA1-9271-F0A7-3CCA-894F4BA05100}"/>
               </a:ext>
             </a:extLst>
           </p:cNvPr>
@@ -6594,8 +6594,8 @@
         </p:blipFill>
         <p:spPr>
           <a:xfrm>
-            <a:off x="0" y="503430"/>
-            <a:ext cx="9144000" cy="4279515"/>
+            <a:off x="0" y="862614"/>
+            <a:ext cx="9144000" cy="3418271"/>
           </a:xfrm>
           <a:prstGeom prst="rect">
             <a:avLst/>
@@ -6680,10 +6680,10 @@
       </p:sp>
       <p:pic>
         <p:nvPicPr>
-          <p:cNvPr id="3" name="Imagen 2">
+          <p:cNvPr id="4" name="Imagen 3">
             <a:extLst>
               <a:ext uri="{FF2B5EF4-FFF2-40B4-BE49-F238E27FC236}">
-                <a16:creationId xmlns:a16="http://schemas.microsoft.com/office/drawing/2014/main" id="{785B82A7-1CAC-4AF0-93F9-5505410009F2}"/>
+                <a16:creationId xmlns:a16="http://schemas.microsoft.com/office/drawing/2014/main" id="{E02E4074-957C-C3B5-4500-007CF598F548}"/>
               </a:ext>
             </a:extLst>
           </p:cNvPr>
@@ -6700,8 +6700,8 @@
         </p:blipFill>
         <p:spPr>
           <a:xfrm>
-            <a:off x="0" y="977401"/>
-            <a:ext cx="9144000" cy="3331574"/>
+            <a:off x="0" y="1286271"/>
+            <a:ext cx="9144000" cy="2713834"/>
           </a:xfrm>
           <a:prstGeom prst="rect">
             <a:avLst/>
@@ -6786,10 +6786,10 @@
       </p:sp>
       <p:pic>
         <p:nvPicPr>
-          <p:cNvPr id="4" name="Imagen 3">
+          <p:cNvPr id="5" name="Imagen 4">
             <a:extLst>
               <a:ext uri="{FF2B5EF4-FFF2-40B4-BE49-F238E27FC236}">
-                <a16:creationId xmlns:a16="http://schemas.microsoft.com/office/drawing/2014/main" id="{5CC3F6AE-09E7-8942-E10C-86402CA6DC34}"/>
+                <a16:creationId xmlns:a16="http://schemas.microsoft.com/office/drawing/2014/main" id="{8DCE8016-2717-7624-D54D-4DD01F5864D9}"/>
               </a:ext>
             </a:extLst>
           </p:cNvPr>
@@ -6806,8 +6806,8 @@
         </p:blipFill>
         <p:spPr>
           <a:xfrm>
-            <a:off x="0" y="797097"/>
-            <a:ext cx="9144000" cy="3692182"/>
+            <a:off x="0" y="861595"/>
+            <a:ext cx="9144000" cy="3563185"/>
           </a:xfrm>
           <a:prstGeom prst="rect">
             <a:avLst/>
@@ -6890,36 +6890,44 @@
           </a:p>
         </p:txBody>
       </p:sp>
-      <p:pic>
-        <p:nvPicPr>
-          <p:cNvPr id="2" name="Imagen 1">
+      <p:sp>
+        <p:nvSpPr>
+          <p:cNvPr id="4" name="CuadroTexto 3">
             <a:extLst>
               <a:ext uri="{FF2B5EF4-FFF2-40B4-BE49-F238E27FC236}">
-                <a16:creationId xmlns:a16="http://schemas.microsoft.com/office/drawing/2014/main" id="{82A0840B-3C0C-62E4-8C40-9A69DCA856FB}"/>
+                <a16:creationId xmlns:a16="http://schemas.microsoft.com/office/drawing/2014/main" id="{A447C9E1-9991-B26D-6B27-ED0D5D0063DD}"/>
               </a:ext>
             </a:extLst>
           </p:cNvPr>
-          <p:cNvPicPr>
-            <a:picLocks noChangeAspect="1"/>
-          </p:cNvPicPr>
+          <p:cNvSpPr txBox="1"/>
           <p:nvPr/>
-        </p:nvPicPr>
-        <p:blipFill>
-          <a:blip r:embed="rId2"/>
-          <a:stretch>
-            <a:fillRect/>
-          </a:stretch>
-        </p:blipFill>
+        </p:nvSpPr>
         <p:spPr>
           <a:xfrm>
-            <a:off x="0" y="1451183"/>
-            <a:ext cx="9144000" cy="2384009"/>
+            <a:off x="2037600" y="2320022"/>
+            <a:ext cx="5184000" cy="646331"/>
           </a:xfrm>
           <a:prstGeom prst="rect">
             <a:avLst/>
           </a:prstGeom>
+          <a:noFill/>
         </p:spPr>
-      </p:pic>
+        <p:txBody>
+          <a:bodyPr wrap="square" rtlCol="0">
+            <a:spAutoFit/>
+          </a:bodyPr>
+          <a:lstStyle/>
+          <a:p>
+            <a:pPr algn="ctr"/>
+            <a:r>
+              <a:rPr lang="es-MX" sz="1800" b="1" dirty="0">
+                <a:latin typeface="Montserrat" panose="00000500000000000000" pitchFamily="2" charset="0"/>
+              </a:rPr>
+              <a:t>No se registró información del gobernador en radiodifusoras</a:t>
+            </a:r>
+          </a:p>
+        </p:txBody>
+      </p:sp>
     </p:spTree>
     <p:extLst>
       <p:ext uri="{BB962C8B-B14F-4D97-AF65-F5344CB8AC3E}">
@@ -6998,10 +7006,10 @@
       </p:sp>
       <p:pic>
         <p:nvPicPr>
-          <p:cNvPr id="3" name="Imagen 2">
+          <p:cNvPr id="4" name="Imagen 3">
             <a:extLst>
               <a:ext uri="{FF2B5EF4-FFF2-40B4-BE49-F238E27FC236}">
-                <a16:creationId xmlns:a16="http://schemas.microsoft.com/office/drawing/2014/main" id="{BB9E8213-DA96-35CF-9B9F-9962D2334033}"/>
+                <a16:creationId xmlns:a16="http://schemas.microsoft.com/office/drawing/2014/main" id="{D51EFAE0-83FC-1202-2502-D7A9E38C8C5F}"/>
               </a:ext>
             </a:extLst>
           </p:cNvPr>
@@ -7018,8 +7026,8 @@
         </p:blipFill>
         <p:spPr>
           <a:xfrm>
-            <a:off x="0" y="670167"/>
-            <a:ext cx="9144000" cy="3946042"/>
+            <a:off x="0" y="642938"/>
+            <a:ext cx="9144000" cy="4000500"/>
           </a:xfrm>
           <a:prstGeom prst="rect">
             <a:avLst/>
@@ -7110,10 +7118,10 @@
       </p:sp>
       <p:pic>
         <p:nvPicPr>
-          <p:cNvPr id="3" name="Imagen 2">
+          <p:cNvPr id="4" name="Imagen 3">
             <a:extLst>
               <a:ext uri="{FF2B5EF4-FFF2-40B4-BE49-F238E27FC236}">
-                <a16:creationId xmlns:a16="http://schemas.microsoft.com/office/drawing/2014/main" id="{B2CB4F50-E30A-38B2-05BB-7101BEE28939}"/>
+                <a16:creationId xmlns:a16="http://schemas.microsoft.com/office/drawing/2014/main" id="{67679B8D-9E3E-3401-87C3-9019DF80EA54}"/>
               </a:ext>
             </a:extLst>
           </p:cNvPr>
@@ -7130,8 +7138,8 @@
         </p:blipFill>
         <p:spPr>
           <a:xfrm>
-            <a:off x="682625" y="547688"/>
-            <a:ext cx="7705725" cy="4191000"/>
+            <a:off x="1926166" y="923925"/>
+            <a:ext cx="5200650" cy="3438525"/>
           </a:xfrm>
           <a:prstGeom prst="rect">
             <a:avLst/>
